--- a/presentation.pptx
+++ b/presentation.pptx
@@ -17,7 +17,8 @@
     <p:sldId id="266" r:id="rId11"/>
     <p:sldId id="267" r:id="rId12"/>
     <p:sldId id="268" r:id="rId13"/>
-    <p:sldId id="269" r:id="rId14"/>
+    <p:sldId id="270" r:id="rId14"/>
+    <p:sldId id="269" r:id="rId15"/>
   </p:sldIdLst>
   <p:sldSz cx="12192000" cy="6858000"/>
   <p:notesSz cx="6858000" cy="9144000"/>
@@ -3976,7 +3977,7 @@
         </p:spPr>
         <p:txBody>
           <a:bodyPr vert="horz" wrap="square" lIns="91440" tIns="45720" rIns="91440" bIns="45720" numCol="1" anchor="t" anchorCtr="0">
-            <a:normAutofit/>
+            <a:normAutofit fontScale="92500"/>
           </a:bodyPr>
           <a:lstStyle/>
           <a:p>
@@ -5444,6 +5445,155 @@
         <p:cNvPr id="1" name="">
           <a:extLst>
             <a:ext uri="{FF2B5EF4-FFF2-40B4-BE49-F238E27FC236}">
+              <a16:creationId xmlns:a16="http://schemas.microsoft.com/office/drawing/2014/main" id="{66875861-E1CE-BA6F-0CCC-FAB419BDDE12}"/>
+            </a:ext>
+          </a:extLst>
+        </p:cNvPr>
+        <p:cNvGrpSpPr/>
+        <p:nvPr/>
+      </p:nvGrpSpPr>
+      <p:grpSpPr>
+        <a:xfrm>
+          <a:off x="0" y="0"/>
+          <a:ext cx="0" cy="0"/>
+          <a:chOff x="0" y="0"/>
+          <a:chExt cx="0" cy="0"/>
+        </a:xfrm>
+      </p:grpSpPr>
+      <p:pic>
+        <p:nvPicPr>
+          <p:cNvPr id="4" name="Picture 3">
+            <a:extLst>
+              <a:ext uri="{FF2B5EF4-FFF2-40B4-BE49-F238E27FC236}">
+                <a16:creationId xmlns:a16="http://schemas.microsoft.com/office/drawing/2014/main" id="{6F287638-B753-267A-7133-85A1F2BED34A}"/>
+              </a:ext>
+            </a:extLst>
+          </p:cNvPr>
+          <p:cNvPicPr>
+            <a:picLocks noChangeAspect="1"/>
+          </p:cNvPicPr>
+          <p:nvPr/>
+        </p:nvPicPr>
+        <p:blipFill>
+          <a:blip r:embed="rId2">
+            <a:extLst>
+              <a:ext uri="{28A0092B-C50C-407E-A947-70E740481C1C}">
+                <a14:useLocalDpi xmlns:a14="http://schemas.microsoft.com/office/drawing/2010/main" val="0"/>
+              </a:ext>
+            </a:extLst>
+          </a:blip>
+          <a:stretch>
+            <a:fillRect/>
+          </a:stretch>
+        </p:blipFill>
+        <p:spPr>
+          <a:xfrm>
+            <a:off x="0" y="0"/>
+            <a:ext cx="12192000" cy="6858000"/>
+          </a:xfrm>
+          <a:prstGeom prst="rect">
+            <a:avLst/>
+          </a:prstGeom>
+        </p:spPr>
+      </p:pic>
+      <p:sp>
+        <p:nvSpPr>
+          <p:cNvPr id="2" name="Title 1">
+            <a:extLst>
+              <a:ext uri="{FF2B5EF4-FFF2-40B4-BE49-F238E27FC236}">
+                <a16:creationId xmlns:a16="http://schemas.microsoft.com/office/drawing/2014/main" id="{CD007B7C-EA6F-07BE-C4E9-F1B87CED5305}"/>
+              </a:ext>
+            </a:extLst>
+          </p:cNvPr>
+          <p:cNvSpPr>
+            <a:spLocks noGrp="1"/>
+          </p:cNvSpPr>
+          <p:nvPr>
+            <p:ph type="ctrTitle"/>
+          </p:nvPr>
+        </p:nvSpPr>
+        <p:spPr>
+          <a:xfrm>
+            <a:off x="1524000" y="-211667"/>
+            <a:ext cx="9144000" cy="2387600"/>
+          </a:xfrm>
+        </p:spPr>
+        <p:txBody>
+          <a:bodyPr/>
+          <a:lstStyle/>
+          <a:p>
+            <a:r>
+              <a:rPr lang="en-IN" b="1" dirty="0" err="1">
+                <a:latin typeface="Montserrat" panose="00000500000000000000" pitchFamily="2" charset="0"/>
+              </a:rPr>
+              <a:t>Mindmap</a:t>
+            </a:r>
+            <a:r>
+              <a:rPr lang="en-IN" b="1" dirty="0">
+                <a:latin typeface="Montserrat" panose="00000500000000000000" pitchFamily="2" charset="0"/>
+              </a:rPr>
+              <a:t> Overview</a:t>
+            </a:r>
+          </a:p>
+        </p:txBody>
+      </p:sp>
+      <p:pic>
+        <p:nvPicPr>
+          <p:cNvPr id="7" name="Picture 6">
+            <a:extLst>
+              <a:ext uri="{FF2B5EF4-FFF2-40B4-BE49-F238E27FC236}">
+                <a16:creationId xmlns:a16="http://schemas.microsoft.com/office/drawing/2014/main" id="{2C06F52F-6F01-50F4-8A08-ABAEADF8C8E8}"/>
+              </a:ext>
+            </a:extLst>
+          </p:cNvPr>
+          <p:cNvPicPr>
+            <a:picLocks noChangeAspect="1"/>
+          </p:cNvPicPr>
+          <p:nvPr/>
+        </p:nvPicPr>
+        <p:blipFill>
+          <a:blip r:embed="rId3">
+            <a:extLst>
+              <a:ext uri="{28A0092B-C50C-407E-A947-70E740481C1C}">
+                <a14:useLocalDpi xmlns:a14="http://schemas.microsoft.com/office/drawing/2010/main" val="0"/>
+              </a:ext>
+            </a:extLst>
+          </a:blip>
+          <a:stretch>
+            <a:fillRect/>
+          </a:stretch>
+        </p:blipFill>
+        <p:spPr>
+          <a:xfrm>
+            <a:off x="3606800" y="2175933"/>
+            <a:ext cx="4470400" cy="4470400"/>
+          </a:xfrm>
+          <a:prstGeom prst="rect">
+            <a:avLst/>
+          </a:prstGeom>
+        </p:spPr>
+      </p:pic>
+    </p:spTree>
+    <p:extLst>
+      <p:ext uri="{BB962C8B-B14F-4D97-AF65-F5344CB8AC3E}">
+        <p14:creationId xmlns:p14="http://schemas.microsoft.com/office/powerpoint/2010/main" val="1355208403"/>
+      </p:ext>
+    </p:extLst>
+  </p:cSld>
+  <p:clrMapOvr>
+    <a:masterClrMapping/>
+  </p:clrMapOvr>
+</p:sld>
+</file>
+
+<file path=ppt/slides/slide14.xml><?xml version="1.0" encoding="utf-8"?>
+<p:sld xmlns:a="http://schemas.openxmlformats.org/drawingml/2006/main" xmlns:r="http://schemas.openxmlformats.org/officeDocument/2006/relationships" xmlns:p="http://schemas.openxmlformats.org/presentationml/2006/main">
+  <p:cSld>
+    <p:spTree>
+      <p:nvGrpSpPr>
+        <p:cNvPr id="1" name="">
+          <a:extLst>
+            <a:ext uri="{FF2B5EF4-FFF2-40B4-BE49-F238E27FC236}">
               <a16:creationId xmlns:a16="http://schemas.microsoft.com/office/drawing/2014/main" id="{185C9BC0-B449-3880-DCF1-3623A9429386}"/>
             </a:ext>
           </a:extLst>
@@ -8671,7 +8821,7 @@
         </p:spPr>
         <p:txBody>
           <a:bodyPr vert="horz" wrap="square" lIns="91440" tIns="45720" rIns="91440" bIns="45720" numCol="1" anchor="t" anchorCtr="0">
-            <a:normAutofit/>
+            <a:normAutofit fontScale="92500"/>
           </a:bodyPr>
           <a:lstStyle/>
           <a:p>
